--- a/m6/diapositivos/sessao-06-m6-f07.pptx
+++ b/m6/diapositivos/sessao-06-m6-f07.pptx
@@ -870,7 +870,7 @@
                 <a:ea typeface="Arial" pitchFamily="34" charset="-122"/>
                 <a:cs typeface="Arial" pitchFamily="34" charset="-120"/>
               </a:rPr>
-              <a:t>Lição M6-F07, Da Noite Fechada às Horas Mortas</a:t>
+              <a:t>Lição M6-F07, Da «Noite Fechada» às «Horas Mortas»</a:t>
             </a:r>
             <a:endParaRPr lang="en-US" sz="1000" dirty="0"/>
           </a:p>
@@ -1028,7 +1028,7 @@
                 <a:ea typeface="Arial" pitchFamily="34" charset="-122"/>
                 <a:cs typeface="Arial" pitchFamily="34" charset="-120"/>
               </a:rPr>
-              <a:t>Da Noite Fechada às Horas Mortas</a:t>
+              <a:t>Da «Noite Fechada» às «Horas Mortas»</a:t>
             </a:r>
             <a:endParaRPr lang="en-US" sz="3400" dirty="0"/>
           </a:p>
@@ -1398,7 +1398,7 @@
                 <a:ea typeface="Arial" pitchFamily="34" charset="-122"/>
                 <a:cs typeface="Arial" pitchFamily="34" charset="-120"/>
               </a:rPr>
-              <a:t>Lição M6-F07, Da Noite Fechada às Horas Mortas</a:t>
+              <a:t>Lição M6-F07, Da «Noite Fechada» às «Horas Mortas»</a:t>
             </a:r>
             <a:endParaRPr lang="en-US" sz="1000" dirty="0"/>
           </a:p>
@@ -2111,7 +2111,7 @@
                 <a:ea typeface="Arial" pitchFamily="34" charset="-122"/>
                 <a:cs typeface="Arial" pitchFamily="34" charset="-120"/>
               </a:rPr>
-              <a:t>Lição M6-F07, Da Noite Fechada às Horas Mortas</a:t>
+              <a:t>Lição M6-F07, Da «Noite Fechada» às «Horas Mortas»</a:t>
             </a:r>
             <a:endParaRPr lang="en-US" sz="1000" dirty="0"/>
           </a:p>
@@ -2734,7 +2734,7 @@
                 <a:ea typeface="Arial" pitchFamily="34" charset="-122"/>
                 <a:cs typeface="Arial" pitchFamily="34" charset="-120"/>
               </a:rPr>
-              <a:t>Lição M6-F07, Da Noite Fechada às Horas Mortas</a:t>
+              <a:t>Lição M6-F07, Da «Noite Fechada» às «Horas Mortas»</a:t>
             </a:r>
             <a:endParaRPr lang="en-US" sz="1000" dirty="0"/>
           </a:p>
@@ -3447,7 +3447,7 @@
                 <a:ea typeface="Arial" pitchFamily="34" charset="-122"/>
                 <a:cs typeface="Arial" pitchFamily="34" charset="-120"/>
               </a:rPr>
-              <a:t>Lição M6-F07, Da Noite Fechada às Horas Mortas</a:t>
+              <a:t>Lição M6-F07, Da «Noite Fechada» às «Horas Mortas»</a:t>
             </a:r>
             <a:endParaRPr lang="en-US" sz="1000" dirty="0"/>
           </a:p>
@@ -3726,7 +3726,7 @@
                 <a:ea typeface="Arial" pitchFamily="34" charset="-122"/>
                 <a:cs typeface="Arial" pitchFamily="34" charset="-120"/>
               </a:rPr>
-              <a:t>Lição M6-F07, Da Noite Fechada às Horas Mortas</a:t>
+              <a:t>Lição M6-F07, Da «Noite Fechada» às «Horas Mortas»</a:t>
             </a:r>
             <a:endParaRPr lang="en-US" sz="1000" dirty="0"/>
           </a:p>
@@ -4096,7 +4096,35 @@
                 <a:ea typeface="Arial" pitchFamily="34" charset="-122"/>
                 <a:cs typeface="Arial" pitchFamily="34" charset="-120"/>
               </a:rPr>
-              <a:t>Cesário Verde, «O Sentimento dum Ocidental», O Livro de Cesário Verde (1887), grafia da edição.</a:t>
+              <a:t>Cesário Verde, «O Sentimento dum Ocidental», </a:t>
+            </a:r>
+            <a:pPr indent="0" marL="0">
+              <a:buNone/>
+            </a:pPr>
+            <a:r>
+              <a:rPr lang="en-US" sz="1200" i="1" dirty="0">
+                <a:solidFill>
+                  <a:srgbClr val="A9A79F"/>
+                </a:solidFill>
+                <a:latin typeface="Arial" pitchFamily="34" charset="0"/>
+                <a:ea typeface="Arial" pitchFamily="34" charset="-122"/>
+                <a:cs typeface="Arial" pitchFamily="34" charset="-120"/>
+              </a:rPr>
+              <a:t>O Livro de Cesário Verde</a:t>
+            </a:r>
+            <a:pPr indent="0" marL="0">
+              <a:buNone/>
+            </a:pPr>
+            <a:r>
+              <a:rPr lang="en-US" sz="1200" dirty="0">
+                <a:solidFill>
+                  <a:srgbClr val="A9A79F"/>
+                </a:solidFill>
+                <a:latin typeface="Arial" pitchFamily="34" charset="0"/>
+                <a:ea typeface="Arial" pitchFamily="34" charset="-122"/>
+                <a:cs typeface="Arial" pitchFamily="34" charset="-120"/>
+              </a:rPr>
+              <a:t> (1887), grafia da edição.</a:t>
             </a:r>
             <a:endParaRPr lang="en-US" sz="1200" dirty="0"/>
           </a:p>
@@ -4206,7 +4234,7 @@
                 <a:ea typeface="Arial" pitchFamily="34" charset="-122"/>
                 <a:cs typeface="Arial" pitchFamily="34" charset="-120"/>
               </a:rPr>
-              <a:t>Lição M6-F07, Da Noite Fechada às Horas Mortas</a:t>
+              <a:t>Lição M6-F07, Da «Noite Fechada» às «Horas Mortas»</a:t>
             </a:r>
             <a:endParaRPr lang="en-US" sz="1000" dirty="0"/>
           </a:p>
@@ -4596,7 +4624,35 @@
                 <a:ea typeface="Arial" pitchFamily="34" charset="-122"/>
                 <a:cs typeface="Arial" pitchFamily="34" charset="-120"/>
               </a:rPr>
-              <a:t>Cesário Verde, «O Sentimento dum Ocidental», O Livro de Cesário Verde (1887), grafia da edição.</a:t>
+              <a:t>Cesário Verde, «O Sentimento dum Ocidental», </a:t>
+            </a:r>
+            <a:pPr indent="0" marL="0">
+              <a:buNone/>
+            </a:pPr>
+            <a:r>
+              <a:rPr lang="en-US" sz="1200" i="1" dirty="0">
+                <a:solidFill>
+                  <a:srgbClr val="A9A79F"/>
+                </a:solidFill>
+                <a:latin typeface="Arial" pitchFamily="34" charset="0"/>
+                <a:ea typeface="Arial" pitchFamily="34" charset="-122"/>
+                <a:cs typeface="Arial" pitchFamily="34" charset="-120"/>
+              </a:rPr>
+              <a:t>O Livro de Cesário Verde</a:t>
+            </a:r>
+            <a:pPr indent="0" marL="0">
+              <a:buNone/>
+            </a:pPr>
+            <a:r>
+              <a:rPr lang="en-US" sz="1200" dirty="0">
+                <a:solidFill>
+                  <a:srgbClr val="A9A79F"/>
+                </a:solidFill>
+                <a:latin typeface="Arial" pitchFamily="34" charset="0"/>
+                <a:ea typeface="Arial" pitchFamily="34" charset="-122"/>
+                <a:cs typeface="Arial" pitchFamily="34" charset="-120"/>
+              </a:rPr>
+              <a:t> (1887), grafia da edição.</a:t>
             </a:r>
             <a:endParaRPr lang="en-US" sz="1200" dirty="0"/>
           </a:p>
@@ -4706,7 +4762,7 @@
                 <a:ea typeface="Arial" pitchFamily="34" charset="-122"/>
                 <a:cs typeface="Arial" pitchFamily="34" charset="-120"/>
               </a:rPr>
-              <a:t>Lição M6-F07, Da Noite Fechada às Horas Mortas</a:t>
+              <a:t>Lição M6-F07, Da «Noite Fechada» às «Horas Mortas»</a:t>
             </a:r>
             <a:endParaRPr lang="en-US" sz="1000" dirty="0"/>
           </a:p>
@@ -5076,7 +5132,35 @@
                 <a:ea typeface="Arial" pitchFamily="34" charset="-122"/>
                 <a:cs typeface="Arial" pitchFamily="34" charset="-120"/>
               </a:rPr>
-              <a:t>Cesário Verde, «O Sentimento dum Ocidental», O Livro de Cesário Verde (1887), grafia da edição.</a:t>
+              <a:t>Cesário Verde, «O Sentimento dum Ocidental», </a:t>
+            </a:r>
+            <a:pPr indent="0" marL="0">
+              <a:buNone/>
+            </a:pPr>
+            <a:r>
+              <a:rPr lang="en-US" sz="1200" i="1" dirty="0">
+                <a:solidFill>
+                  <a:srgbClr val="A9A79F"/>
+                </a:solidFill>
+                <a:latin typeface="Arial" pitchFamily="34" charset="0"/>
+                <a:ea typeface="Arial" pitchFamily="34" charset="-122"/>
+                <a:cs typeface="Arial" pitchFamily="34" charset="-120"/>
+              </a:rPr>
+              <a:t>O Livro de Cesário Verde</a:t>
+            </a:r>
+            <a:pPr indent="0" marL="0">
+              <a:buNone/>
+            </a:pPr>
+            <a:r>
+              <a:rPr lang="en-US" sz="1200" dirty="0">
+                <a:solidFill>
+                  <a:srgbClr val="A9A79F"/>
+                </a:solidFill>
+                <a:latin typeface="Arial" pitchFamily="34" charset="0"/>
+                <a:ea typeface="Arial" pitchFamily="34" charset="-122"/>
+                <a:cs typeface="Arial" pitchFamily="34" charset="-120"/>
+              </a:rPr>
+              <a:t> (1887), grafia da edição.</a:t>
             </a:r>
             <a:endParaRPr lang="en-US" sz="1200" dirty="0"/>
           </a:p>
@@ -5186,7 +5270,7 @@
                 <a:ea typeface="Arial" pitchFamily="34" charset="-122"/>
                 <a:cs typeface="Arial" pitchFamily="34" charset="-120"/>
               </a:rPr>
-              <a:t>Lição M6-F07, Da Noite Fechada às Horas Mortas</a:t>
+              <a:t>Lição M6-F07, Da «Noite Fechada» às «Horas Mortas»</a:t>
             </a:r>
             <a:endParaRPr lang="en-US" sz="1000" dirty="0"/>
           </a:p>
@@ -5576,7 +5660,35 @@
                 <a:ea typeface="Arial" pitchFamily="34" charset="-122"/>
                 <a:cs typeface="Arial" pitchFamily="34" charset="-120"/>
               </a:rPr>
-              <a:t>Cesário Verde, «O Sentimento dum Ocidental», O Livro de Cesário Verde (1887), grafia da edição.</a:t>
+              <a:t>Cesário Verde, «O Sentimento dum Ocidental», </a:t>
+            </a:r>
+            <a:pPr indent="0" marL="0">
+              <a:buNone/>
+            </a:pPr>
+            <a:r>
+              <a:rPr lang="en-US" sz="1200" i="1" dirty="0">
+                <a:solidFill>
+                  <a:srgbClr val="A9A79F"/>
+                </a:solidFill>
+                <a:latin typeface="Arial" pitchFamily="34" charset="0"/>
+                <a:ea typeface="Arial" pitchFamily="34" charset="-122"/>
+                <a:cs typeface="Arial" pitchFamily="34" charset="-120"/>
+              </a:rPr>
+              <a:t>O Livro de Cesário Verde</a:t>
+            </a:r>
+            <a:pPr indent="0" marL="0">
+              <a:buNone/>
+            </a:pPr>
+            <a:r>
+              <a:rPr lang="en-US" sz="1200" dirty="0">
+                <a:solidFill>
+                  <a:srgbClr val="A9A79F"/>
+                </a:solidFill>
+                <a:latin typeface="Arial" pitchFamily="34" charset="0"/>
+                <a:ea typeface="Arial" pitchFamily="34" charset="-122"/>
+                <a:cs typeface="Arial" pitchFamily="34" charset="-120"/>
+              </a:rPr>
+              <a:t> (1887), grafia da edição.</a:t>
             </a:r>
             <a:endParaRPr lang="en-US" sz="1200" dirty="0"/>
           </a:p>
@@ -5686,7 +5798,7 @@
                 <a:ea typeface="Arial" pitchFamily="34" charset="-122"/>
                 <a:cs typeface="Arial" pitchFamily="34" charset="-120"/>
               </a:rPr>
-              <a:t>Lição M6-F07, Da Noite Fechada às Horas Mortas</a:t>
+              <a:t>Lição M6-F07, Da «Noite Fechada» às «Horas Mortas»</a:t>
             </a:r>
             <a:endParaRPr lang="en-US" sz="1000" dirty="0"/>
           </a:p>
@@ -6309,7 +6421,7 @@
                 <a:ea typeface="Arial" pitchFamily="34" charset="-122"/>
                 <a:cs typeface="Arial" pitchFamily="34" charset="-120"/>
               </a:rPr>
-              <a:t>Lição M6-F07, Da Noite Fechada às Horas Mortas</a:t>
+              <a:t>Lição M6-F07, Da «Noite Fechada» às «Horas Mortas»</a:t>
             </a:r>
             <a:endParaRPr lang="en-US" sz="1000" dirty="0"/>
           </a:p>
@@ -7376,7 +7488,7 @@
                 <a:ea typeface="Arial" pitchFamily="34" charset="-122"/>
                 <a:cs typeface="Arial" pitchFamily="34" charset="-120"/>
               </a:rPr>
-              <a:t>Lição M6-F07, Da Noite Fechada às Horas Mortas</a:t>
+              <a:t>Lição M6-F07, Da «Noite Fechada» às «Horas Mortas»</a:t>
             </a:r>
             <a:endParaRPr lang="en-US" sz="1000" dirty="0"/>
           </a:p>
